--- a/Calendario2025/Presentaciones/6_DHCP.pptx
+++ b/Calendario2025/Presentaciones/6_DHCP.pptx
@@ -214,7 +214,7 @@
           <a:p>
             <a:fld id="{2D445F07-8756-451B-A938-0248325FC7BB}" type="datetimeFigureOut">
               <a:rPr lang="es-MX" smtClean="0"/>
-              <a:t>20/03/2025</a:t>
+              <a:t>13/05/2025</a:t>
             </a:fld>
             <a:endParaRPr lang="es-MX" dirty="0"/>
           </a:p>
@@ -1003,7 +1003,7 @@
           <a:p>
             <a:fld id="{5E75A0DC-66C6-4CEC-A5EB-F8C97CEC3796}" type="datetimeFigureOut">
               <a:rPr lang="es-MX" smtClean="0"/>
-              <a:t>20/03/2025</a:t>
+              <a:t>13/05/2025</a:t>
             </a:fld>
             <a:endParaRPr lang="es-MX" dirty="0"/>
           </a:p>
@@ -1173,7 +1173,7 @@
           <a:p>
             <a:fld id="{5E75A0DC-66C6-4CEC-A5EB-F8C97CEC3796}" type="datetimeFigureOut">
               <a:rPr lang="es-MX" smtClean="0"/>
-              <a:t>20/03/2025</a:t>
+              <a:t>13/05/2025</a:t>
             </a:fld>
             <a:endParaRPr lang="es-MX" dirty="0"/>
           </a:p>
@@ -1353,7 +1353,7 @@
           <a:p>
             <a:fld id="{5E75A0DC-66C6-4CEC-A5EB-F8C97CEC3796}" type="datetimeFigureOut">
               <a:rPr lang="es-MX" smtClean="0"/>
-              <a:t>20/03/2025</a:t>
+              <a:t>13/05/2025</a:t>
             </a:fld>
             <a:endParaRPr lang="es-MX" dirty="0"/>
           </a:p>
@@ -1523,7 +1523,7 @@
           <a:p>
             <a:fld id="{5E75A0DC-66C6-4CEC-A5EB-F8C97CEC3796}" type="datetimeFigureOut">
               <a:rPr lang="es-MX" smtClean="0"/>
-              <a:t>20/03/2025</a:t>
+              <a:t>13/05/2025</a:t>
             </a:fld>
             <a:endParaRPr lang="es-MX" dirty="0"/>
           </a:p>
@@ -1769,7 +1769,7 @@
           <a:p>
             <a:fld id="{5E75A0DC-66C6-4CEC-A5EB-F8C97CEC3796}" type="datetimeFigureOut">
               <a:rPr lang="es-MX" smtClean="0"/>
-              <a:t>20/03/2025</a:t>
+              <a:t>13/05/2025</a:t>
             </a:fld>
             <a:endParaRPr lang="es-MX" dirty="0"/>
           </a:p>
@@ -2057,7 +2057,7 @@
           <a:p>
             <a:fld id="{5E75A0DC-66C6-4CEC-A5EB-F8C97CEC3796}" type="datetimeFigureOut">
               <a:rPr lang="es-MX" smtClean="0"/>
-              <a:t>20/03/2025</a:t>
+              <a:t>13/05/2025</a:t>
             </a:fld>
             <a:endParaRPr lang="es-MX" dirty="0"/>
           </a:p>
@@ -2479,7 +2479,7 @@
           <a:p>
             <a:fld id="{5E75A0DC-66C6-4CEC-A5EB-F8C97CEC3796}" type="datetimeFigureOut">
               <a:rPr lang="es-MX" smtClean="0"/>
-              <a:t>20/03/2025</a:t>
+              <a:t>13/05/2025</a:t>
             </a:fld>
             <a:endParaRPr lang="es-MX" dirty="0"/>
           </a:p>
@@ -2597,7 +2597,7 @@
           <a:p>
             <a:fld id="{5E75A0DC-66C6-4CEC-A5EB-F8C97CEC3796}" type="datetimeFigureOut">
               <a:rPr lang="es-MX" smtClean="0"/>
-              <a:t>20/03/2025</a:t>
+              <a:t>13/05/2025</a:t>
             </a:fld>
             <a:endParaRPr lang="es-MX" dirty="0"/>
           </a:p>
@@ -2692,7 +2692,7 @@
           <a:p>
             <a:fld id="{5E75A0DC-66C6-4CEC-A5EB-F8C97CEC3796}" type="datetimeFigureOut">
               <a:rPr lang="es-MX" smtClean="0"/>
-              <a:t>20/03/2025</a:t>
+              <a:t>13/05/2025</a:t>
             </a:fld>
             <a:endParaRPr lang="es-MX" dirty="0"/>
           </a:p>
@@ -2969,7 +2969,7 @@
           <a:p>
             <a:fld id="{5E75A0DC-66C6-4CEC-A5EB-F8C97CEC3796}" type="datetimeFigureOut">
               <a:rPr lang="es-MX" smtClean="0"/>
-              <a:t>20/03/2025</a:t>
+              <a:t>13/05/2025</a:t>
             </a:fld>
             <a:endParaRPr lang="es-MX" dirty="0"/>
           </a:p>
@@ -3222,7 +3222,7 @@
           <a:p>
             <a:fld id="{5E75A0DC-66C6-4CEC-A5EB-F8C97CEC3796}" type="datetimeFigureOut">
               <a:rPr lang="es-MX" smtClean="0"/>
-              <a:t>20/03/2025</a:t>
+              <a:t>13/05/2025</a:t>
             </a:fld>
             <a:endParaRPr lang="es-MX" dirty="0"/>
           </a:p>
@@ -3435,7 +3435,7 @@
           <a:p>
             <a:fld id="{5E75A0DC-66C6-4CEC-A5EB-F8C97CEC3796}" type="datetimeFigureOut">
               <a:rPr lang="es-MX" smtClean="0"/>
-              <a:t>20/03/2025</a:t>
+              <a:t>13/05/2025</a:t>
             </a:fld>
             <a:endParaRPr lang="es-MX" dirty="0"/>
           </a:p>
@@ -6303,73 +6303,6 @@
               </a:lnSpc>
             </a:pPr>
             <a:r>
-              <a:rPr lang="es-MX" sz="1600" b="1" dirty="0" err="1">
-                <a:solidFill>
-                  <a:schemeClr val="bg2">
-                    <a:lumMod val="25000"/>
-                  </a:schemeClr>
-                </a:solidFill>
-                <a:latin typeface="Arial" panose="020B0604020202020204" pitchFamily="34" charset="0"/>
-                <a:cs typeface="Arial" panose="020B0604020202020204" pitchFamily="34" charset="0"/>
-              </a:rPr>
-              <a:t>dns</a:t>
-            </a:r>
-            <a:r>
-              <a:rPr lang="es-MX" sz="1600" b="1" dirty="0">
-                <a:solidFill>
-                  <a:schemeClr val="bg2">
-                    <a:lumMod val="25000"/>
-                  </a:schemeClr>
-                </a:solidFill>
-                <a:latin typeface="Arial" panose="020B0604020202020204" pitchFamily="34" charset="0"/>
-                <a:cs typeface="Arial" panose="020B0604020202020204" pitchFamily="34" charset="0"/>
-              </a:rPr>
-              <a:t>-server</a:t>
-            </a:r>
-            <a:r>
-              <a:rPr lang="es-MX" sz="1600" dirty="0">
-                <a:solidFill>
-                  <a:schemeClr val="bg2">
-                    <a:lumMod val="25000"/>
-                  </a:schemeClr>
-                </a:solidFill>
-                <a:latin typeface="Arial" panose="020B0604020202020204" pitchFamily="34" charset="0"/>
-                <a:cs typeface="Arial" panose="020B0604020202020204" pitchFamily="34" charset="0"/>
-              </a:rPr>
-              <a:t> </a:t>
-            </a:r>
-            <a:r>
-              <a:rPr lang="es-MX" sz="1600" dirty="0" err="1">
-                <a:solidFill>
-                  <a:schemeClr val="bg2">
-                    <a:lumMod val="25000"/>
-                  </a:schemeClr>
-                </a:solidFill>
-                <a:latin typeface="Arial" panose="020B0604020202020204" pitchFamily="34" charset="0"/>
-                <a:cs typeface="Arial" panose="020B0604020202020204" pitchFamily="34" charset="0"/>
-              </a:rPr>
-              <a:t>dirIP</a:t>
-            </a:r>
-            <a:r>
-              <a:rPr lang="es-MX" sz="1600" dirty="0">
-                <a:solidFill>
-                  <a:schemeClr val="bg2">
-                    <a:lumMod val="25000"/>
-                  </a:schemeClr>
-                </a:solidFill>
-                <a:latin typeface="Arial" panose="020B0604020202020204" pitchFamily="34" charset="0"/>
-                <a:cs typeface="Arial" panose="020B0604020202020204" pitchFamily="34" charset="0"/>
-              </a:rPr>
-              <a:t>-Server</a:t>
-            </a:r>
-          </a:p>
-          <a:p>
-            <a:pPr lvl="1">
-              <a:lnSpc>
-                <a:spcPct val="150000"/>
-              </a:lnSpc>
-            </a:pPr>
-            <a:r>
               <a:rPr lang="es-MX" sz="1600" b="1" dirty="0">
                 <a:solidFill>
                   <a:schemeClr val="bg2">
@@ -6426,6 +6359,73 @@
               <a:latin typeface="Arial" panose="020B0604020202020204" pitchFamily="34" charset="0"/>
               <a:cs typeface="Arial" panose="020B0604020202020204" pitchFamily="34" charset="0"/>
             </a:endParaRPr>
+          </a:p>
+          <a:p>
+            <a:pPr lvl="1">
+              <a:lnSpc>
+                <a:spcPct val="150000"/>
+              </a:lnSpc>
+            </a:pPr>
+            <a:r>
+              <a:rPr lang="es-MX" sz="1600" b="1" dirty="0" err="1">
+                <a:solidFill>
+                  <a:schemeClr val="bg2">
+                    <a:lumMod val="25000"/>
+                  </a:schemeClr>
+                </a:solidFill>
+                <a:latin typeface="Arial" panose="020B0604020202020204" pitchFamily="34" charset="0"/>
+                <a:cs typeface="Arial" panose="020B0604020202020204" pitchFamily="34" charset="0"/>
+              </a:rPr>
+              <a:t>dns</a:t>
+            </a:r>
+            <a:r>
+              <a:rPr lang="es-MX" sz="1600" b="1" dirty="0">
+                <a:solidFill>
+                  <a:schemeClr val="bg2">
+                    <a:lumMod val="25000"/>
+                  </a:schemeClr>
+                </a:solidFill>
+                <a:latin typeface="Arial" panose="020B0604020202020204" pitchFamily="34" charset="0"/>
+                <a:cs typeface="Arial" panose="020B0604020202020204" pitchFamily="34" charset="0"/>
+              </a:rPr>
+              <a:t>-server</a:t>
+            </a:r>
+            <a:r>
+              <a:rPr lang="es-MX" sz="1600" dirty="0">
+                <a:solidFill>
+                  <a:schemeClr val="bg2">
+                    <a:lumMod val="25000"/>
+                  </a:schemeClr>
+                </a:solidFill>
+                <a:latin typeface="Arial" panose="020B0604020202020204" pitchFamily="34" charset="0"/>
+                <a:cs typeface="Arial" panose="020B0604020202020204" pitchFamily="34" charset="0"/>
+              </a:rPr>
+              <a:t> </a:t>
+            </a:r>
+            <a:r>
+              <a:rPr lang="es-MX" sz="1600" dirty="0" err="1">
+                <a:solidFill>
+                  <a:schemeClr val="bg2">
+                    <a:lumMod val="25000"/>
+                  </a:schemeClr>
+                </a:solidFill>
+                <a:latin typeface="Arial" panose="020B0604020202020204" pitchFamily="34" charset="0"/>
+                <a:cs typeface="Arial" panose="020B0604020202020204" pitchFamily="34" charset="0"/>
+              </a:rPr>
+              <a:t>dirIP</a:t>
+            </a:r>
+            <a:r>
+              <a:rPr lang="es-MX" sz="1600" dirty="0">
+                <a:solidFill>
+                  <a:schemeClr val="bg2">
+                    <a:lumMod val="25000"/>
+                  </a:schemeClr>
+                </a:solidFill>
+                <a:latin typeface="Arial" panose="020B0604020202020204" pitchFamily="34" charset="0"/>
+                <a:cs typeface="Arial" panose="020B0604020202020204" pitchFamily="34" charset="0"/>
+              </a:rPr>
+              <a:t>-Server</a:t>
+            </a:r>
           </a:p>
           <a:p>
             <a:pPr lvl="1">
@@ -7447,7 +7447,7 @@
                 <a:latin typeface="Arial" panose="020B0604020202020204" pitchFamily="34" charset="0"/>
                 <a:cs typeface="Arial" panose="020B0604020202020204" pitchFamily="34" charset="0"/>
               </a:rPr>
-              <a:t>Ip</a:t>
+              <a:t>ip</a:t>
             </a:r>
             <a:r>
               <a:rPr lang="es-MX" sz="1600" b="1" dirty="0">
